--- a/reports/ppt/올리브영_PB_UGC_시딩_성과_3P.pptx
+++ b/reports/ppt/올리브영_PB_UGC_시딩_성과_3P.pptx
@@ -1165,7 +1165,7 @@
                 <a:ea typeface="맑은 고딕" pitchFamily="34" charset="-122"/>
                 <a:cs typeface="맑은 고딕" pitchFamily="34" charset="-120"/>
               </a:rPr>
-              <a:t>IMD 26.09.04 기준 · 전체 2,139건</a:t>
+              <a:t>수량 2,139건 · 조회수 데이터 2,050건 (IMD 26.09.04)</a:t>
             </a:r>
             <a:endParaRPr lang="en-US" sz="1100" dirty="0"/>
           </a:p>
@@ -1390,7 +1390,7 @@
                 <a:ea typeface="맑은 고딕" pitchFamily="34" charset="-122"/>
                 <a:cs typeface="맑은 고딕" pitchFamily="34" charset="-120"/>
               </a:rPr>
-              <a:t>평균 원고료</a:t>
+              <a:t>건당 단가</a:t>
             </a:r>
             <a:endParaRPr lang="en-US" sz="1250" dirty="0"/>
           </a:p>
@@ -1429,7 +1429,7 @@
                 <a:ea typeface="맑은 고딕" pitchFamily="34" charset="-122"/>
                 <a:cs typeface="맑은 고딕" pitchFamily="34" charset="-120"/>
               </a:rPr>
-              <a:t>24.7만원</a:t>
+              <a:t>43.5만원</a:t>
             </a:r>
             <a:endParaRPr lang="en-US" sz="3300" dirty="0"/>
           </a:p>
@@ -1471,7 +1471,27 @@
                 <a:ea typeface="맑은 고딕" pitchFamily="34" charset="-122"/>
                 <a:cs typeface="맑은 고딕" pitchFamily="34" charset="-120"/>
               </a:rPr>
-              <a:t>원고료 딜메이킹 전략</a:t>
+              <a:t>세금계산서 기준</a:t>
+            </a:r>
+            <a:endParaRPr lang="en-US" sz="1250" dirty="0"/>
+          </a:p>
+          <a:p>
+            <a:pPr algn="ctr" indent="0" marL="0">
+              <a:lnSpc>
+                <a:spcPct val="115000"/>
+              </a:lnSpc>
+              <a:buNone/>
+            </a:pPr>
+            <a:r>
+              <a:rPr lang="en-US" sz="1250" b="1" dirty="0">
+                <a:solidFill>
+                  <a:srgbClr val="FFFFFF"/>
+                </a:solidFill>
+                <a:latin typeface="맑은 고딕" pitchFamily="34" charset="0"/>
+                <a:ea typeface="맑은 고딕" pitchFamily="34" charset="-122"/>
+                <a:cs typeface="맑은 고딕" pitchFamily="34" charset="-120"/>
+              </a:rPr>
+              <a:t>931,288,075원 ÷ 2,139건</a:t>
             </a:r>
             <a:endParaRPr lang="en-US" sz="1250" dirty="0"/>
           </a:p>
@@ -1513,7 +1533,7 @@
                 <a:ea typeface="맑은 고딕" pitchFamily="34" charset="-122"/>
                 <a:cs typeface="맑은 고딕" pitchFamily="34" charset="-120"/>
               </a:rPr>
-              <a:t>※ 참고 : 총 원고료 5.28억원</a:t>
+              <a:t>※ 참고 : 크리에이터 원고료 기준</a:t>
             </a:r>
             <a:endParaRPr lang="en-US" sz="900" dirty="0"/>
           </a:p>
@@ -1533,7 +1553,7 @@
                 <a:ea typeface="맑은 고딕" pitchFamily="34" charset="-122"/>
                 <a:cs typeface="맑은 고딕" pitchFamily="34" charset="-120"/>
               </a:rPr>
-              <a:t>전체 2,139건 기준</a:t>
+              <a:t>건당 24.7만원 (총 5.28억원)</a:t>
             </a:r>
             <a:endParaRPr lang="en-US" sz="900" dirty="0"/>
           </a:p>
@@ -1658,7 +1678,7 @@
                 <a:ea typeface="맑은 고딕" pitchFamily="34" charset="-122"/>
                 <a:cs typeface="맑은 고딕" pitchFamily="34" charset="-120"/>
               </a:rPr>
-              <a:t>34.7%</a:t>
+              <a:t>36.2%</a:t>
             </a:r>
             <a:endParaRPr lang="en-US" sz="3300" dirty="0"/>
           </a:p>
@@ -1700,7 +1720,7 @@
                 <a:ea typeface="맑은 고딕" pitchFamily="34" charset="-122"/>
                 <a:cs typeface="맑은 고딕" pitchFamily="34" charset="-120"/>
               </a:rPr>
-              <a:t>743건 / 2,139건</a:t>
+              <a:t>743건 / 2,050건</a:t>
             </a:r>
             <a:endParaRPr lang="en-US" sz="1250" dirty="0"/>
           </a:p>
@@ -2365,7 +2385,7 @@
                 <a:ea typeface="맑은 고딕" pitchFamily="34" charset="-122"/>
                 <a:cs typeface="맑은 고딕" pitchFamily="34" charset="-120"/>
               </a:rPr>
-              <a:t>10.2원</a:t>
+              <a:t>9.4원</a:t>
             </a:r>
             <a:endParaRPr lang="en-US" sz="3300" dirty="0"/>
           </a:p>
@@ -2489,7 +2509,7 @@
                 <a:ea typeface="맑은 고딕" pitchFamily="34" charset="-122"/>
                 <a:cs typeface="맑은 고딕" pitchFamily="34" charset="-120"/>
               </a:rPr>
-              <a:t>(성과보유 2,050건 기준 9.42원)</a:t>
+              <a:t>전체 건당 조회수 25,304뷰</a:t>
             </a:r>
             <a:endParaRPr lang="en-US" sz="900" dirty="0"/>
           </a:p>
@@ -2639,7 +2659,7 @@
                 <a:ea typeface="맑은 고딕" pitchFamily="34" charset="-122"/>
                 <a:cs typeface="맑은 고딕" pitchFamily="34" charset="-120"/>
               </a:rPr>
-              <a:t>IMD 26.09.04 기준 · 전체 2,139건</a:t>
+              <a:t>수량 2,139건 · 조회수 데이터 2,050건 (IMD 26.09.04)</a:t>
             </a:r>
             <a:endParaRPr lang="en-US" sz="1100" dirty="0"/>
           </a:p>
@@ -2903,7 +2923,7 @@
                 <a:ea typeface="맑은 고딕" pitchFamily="34" charset="-122"/>
                 <a:cs typeface="맑은 고딕" pitchFamily="34" charset="-120"/>
               </a:rPr>
-              <a:t>1,441원</a:t>
+              <a:t>1,334원</a:t>
             </a:r>
             <a:endParaRPr lang="en-US" sz="3300" dirty="0"/>
           </a:p>
@@ -3924,7 +3944,7 @@
                 <a:ea typeface="맑은 고딕" pitchFamily="34" charset="-122"/>
                 <a:cs typeface="맑은 고딕" pitchFamily="34" charset="-120"/>
               </a:rPr>
-              <a:t>IMD 26.09.04 기준 · 전체 2,139건</a:t>
+              <a:t>수량 2,139건 · 조회수 데이터 2,050건 (IMD 26.09.04)</a:t>
             </a:r>
             <a:endParaRPr lang="en-US" sz="1100" dirty="0"/>
           </a:p>
@@ -4083,7 +4103,7 @@
                 <a:ea typeface="맑은 고딕" pitchFamily="34" charset="-122"/>
                 <a:cs typeface="맑은 고딕" pitchFamily="34" charset="-120"/>
               </a:rPr>
-              <a:t>전체 2,139건 기준 · 성과 데이터 보유 2,050건 (글로벌 89건 성과 데이터 없음)</a:t>
+              <a:t>조회수·ROAS·매출 분포 모수 = 조회수 데이터 보유 2,050건 · 글로벌 시딩은 전체 2,139건 기준</a:t>
             </a:r>
             <a:endParaRPr lang="en-US" sz="1350" dirty="0"/>
           </a:p>
@@ -4656,7 +4676,7 @@
                 <a:ea typeface="맑은 고딕" pitchFamily="34" charset="-122"/>
                 <a:cs typeface="맑은 고딕" pitchFamily="34" charset="-120"/>
               </a:rPr>
-              <a:t>총 합</a:t>
+              <a:t>모 수</a:t>
             </a:r>
             <a:endParaRPr lang="en-US" sz="1150" dirty="0"/>
           </a:p>
@@ -4695,7 +4715,7 @@
                 <a:ea typeface="맑은 고딕" pitchFamily="34" charset="-122"/>
                 <a:cs typeface="맑은 고딕" pitchFamily="34" charset="-120"/>
               </a:rPr>
-              <a:t>2,139건</a:t>
+              <a:t>2,050건</a:t>
             </a:r>
             <a:endParaRPr lang="en-US" sz="1150" dirty="0"/>
           </a:p>
@@ -5268,7 +5288,7 @@
                 <a:ea typeface="맑은 고딕" pitchFamily="34" charset="-122"/>
                 <a:cs typeface="맑은 고딕" pitchFamily="34" charset="-120"/>
               </a:rPr>
-              <a:t>총 합</a:t>
+              <a:t>모 수</a:t>
             </a:r>
             <a:endParaRPr lang="en-US" sz="1150" dirty="0"/>
           </a:p>
@@ -5307,7 +5327,7 @@
                 <a:ea typeface="맑은 고딕" pitchFamily="34" charset="-122"/>
                 <a:cs typeface="맑은 고딕" pitchFamily="34" charset="-120"/>
               </a:rPr>
-              <a:t>2,139건</a:t>
+              <a:t>2,050건</a:t>
             </a:r>
             <a:endParaRPr lang="en-US" sz="1150" dirty="0"/>
           </a:p>
@@ -5880,7 +5900,7 @@
                 <a:ea typeface="맑은 고딕" pitchFamily="34" charset="-122"/>
                 <a:cs typeface="맑은 고딕" pitchFamily="34" charset="-120"/>
               </a:rPr>
-              <a:t>총 합</a:t>
+              <a:t>모 수</a:t>
             </a:r>
             <a:endParaRPr lang="en-US" sz="1150" dirty="0"/>
           </a:p>
@@ -5919,7 +5939,7 @@
                 <a:ea typeface="맑은 고딕" pitchFamily="34" charset="-122"/>
                 <a:cs typeface="맑은 고딕" pitchFamily="34" charset="-120"/>
               </a:rPr>
-              <a:t>2,139건</a:t>
+              <a:t>2,050건</a:t>
             </a:r>
             <a:endParaRPr lang="en-US" sz="1150" dirty="0"/>
           </a:p>
@@ -6526,7 +6546,7 @@
                 <a:ea typeface="맑은 고딕" pitchFamily="34" charset="-122"/>
                 <a:cs typeface="맑은 고딕" pitchFamily="34" charset="-120"/>
               </a:rPr>
-              <a:t>※ ROAS 기준은 광고비 10만원 이상 집행 건(242건)에서만 카운트 · 매출액은 광고 집행 건에서만 발생 · 글로벌 시딩은 일본 99건(고정비 4,070만원) + 미국 68건(3,000만원)</a:t>
+              <a:t>※ 글로벌 89건(미국 68 · 일본 26.09 21)은 조회수 데이터가 없어 분포 판정 불가 → 위 건수는 하한이며 데이터 확보 시 증가 · ROAS는 광고비 10만원 이상 집행 건(242건)에서만 카운트</a:t>
             </a:r>
             <a:endParaRPr lang="en-US" sz="900" dirty="0"/>
           </a:p>

--- a/reports/ppt/올리브영_PB_UGC_시딩_성과_3P.pptx
+++ b/reports/ppt/올리브영_PB_UGC_시딩_성과_3P.pptx
@@ -1390,7 +1390,7 @@
                 <a:ea typeface="맑은 고딕" pitchFamily="34" charset="-122"/>
                 <a:cs typeface="맑은 고딕" pitchFamily="34" charset="-120"/>
               </a:rPr>
-              <a:t>건당 단가</a:t>
+              <a:t>평균 원고료</a:t>
             </a:r>
             <a:endParaRPr lang="en-US" sz="1250" dirty="0"/>
           </a:p>
@@ -1429,7 +1429,7 @@
                 <a:ea typeface="맑은 고딕" pitchFamily="34" charset="-122"/>
                 <a:cs typeface="맑은 고딕" pitchFamily="34" charset="-120"/>
               </a:rPr>
-              <a:t>43.5만원</a:t>
+              <a:t>23.8만원</a:t>
             </a:r>
             <a:endParaRPr lang="en-US" sz="3300" dirty="0"/>
           </a:p>
@@ -1471,27 +1471,7 @@
                 <a:ea typeface="맑은 고딕" pitchFamily="34" charset="-122"/>
                 <a:cs typeface="맑은 고딕" pitchFamily="34" charset="-120"/>
               </a:rPr>
-              <a:t>세금계산서 기준</a:t>
-            </a:r>
-            <a:endParaRPr lang="en-US" sz="1250" dirty="0"/>
-          </a:p>
-          <a:p>
-            <a:pPr algn="ctr" indent="0" marL="0">
-              <a:lnSpc>
-                <a:spcPct val="115000"/>
-              </a:lnSpc>
-              <a:buNone/>
-            </a:pPr>
-            <a:r>
-              <a:rPr lang="en-US" sz="1250" b="1" dirty="0">
-                <a:solidFill>
-                  <a:srgbClr val="FFFFFF"/>
-                </a:solidFill>
-                <a:latin typeface="맑은 고딕" pitchFamily="34" charset="0"/>
-                <a:ea typeface="맑은 고딕" pitchFamily="34" charset="-122"/>
-                <a:cs typeface="맑은 고딕" pitchFamily="34" charset="-120"/>
-              </a:rPr>
-              <a:t>931,288,075원 ÷ 2,139건</a:t>
+              <a:t>488,708,205원 ÷ 2,050건</a:t>
             </a:r>
             <a:endParaRPr lang="en-US" sz="1250" dirty="0"/>
           </a:p>
@@ -1533,7 +1513,7 @@
                 <a:ea typeface="맑은 고딕" pitchFamily="34" charset="-122"/>
                 <a:cs typeface="맑은 고딕" pitchFamily="34" charset="-120"/>
               </a:rPr>
-              <a:t>※ 참고 : 크리에이터 원고료 기준</a:t>
+              <a:t>※ 참고 : 중위 25만원 (최다 25만원 1,167건)</a:t>
             </a:r>
             <a:endParaRPr lang="en-US" sz="900" dirty="0"/>
           </a:p>
@@ -1553,7 +1533,7 @@
                 <a:ea typeface="맑은 고딕" pitchFamily="34" charset="-122"/>
                 <a:cs typeface="맑은 고딕" pitchFamily="34" charset="-120"/>
               </a:rPr>
-              <a:t>건당 24.7만원 (총 5.28억원)</a:t>
+              <a:t>마크업·VAT 포함 광고주 단가 약 32만원</a:t>
             </a:r>
             <a:endParaRPr lang="en-US" sz="900" dirty="0"/>
           </a:p>
